--- a/entrega/QGate_final.pptx
+++ b/entrega/QGate_final.pptx
@@ -893,7 +893,7 @@
           <a:lstStyle/>
           <a:p>
             <a:r>
-              <a:t>Al crecer hasta N=16 la parte cuántica sigue en 9 qubits y la memoria no crece. Sin óptimo conocido medimos contra una cota inferior. Lo decimos claro: en simulador, simulated annealing gana en calidad y tiempo.</a:t>
+              <a:t>Para la final medimos N de 10 a 20 con 10 semillas y el mismo presupuesto para todos. La memoria cuántica no crece: siempre 9 qubits. La calidad todavía no escala: la tabla muestra la mediana y el rango entre semillas de SA y del híbrido con QAOA, cuánto de la reducción de costo vino de los bloques QAOA y qué fracción del tiempo se fue en QAOA.</a:t>
             </a:r>
           </a:p>
         </p:txBody>
